--- a/report/2026_06_16_competitive_report.pptx
+++ b/report/2026_06_16_competitive_report.pptx
@@ -5255,8 +5255,8 @@
         </p:blipFill>
         <p:spPr>
           <a:xfrm>
-            <a:off x="4135374" y="1188720"/>
-            <a:ext cx="3909060" cy="5212080"/>
+            <a:off x="2180844" y="1188720"/>
+            <a:ext cx="7818120" cy="5212080"/>
           </a:xfrm>
           <a:prstGeom prst="rect">
             <a:avLst/>
